--- a/ORG/Политическое устройство Киевской Руси.pptx
+++ b/ORG/Политическое устройство Киевской Руси.pptx
@@ -12,6 +12,7 @@
     <p:sldId id="259" r:id="rId6"/>
     <p:sldId id="261" r:id="rId7"/>
     <p:sldId id="262" r:id="rId8"/>
+    <p:sldId id="263" r:id="rId9"/>
   </p:sldIdLst>
   <p:sldSz cx="12192000" cy="6858000"/>
   <p:notesSz cx="6858000" cy="9144000"/>
@@ -4048,24 +4049,44 @@
         <p:spPr/>
         <p:txBody>
           <a:bodyPr>
-            <a:normAutofit lnSpcReduction="10000"/>
+            <a:normAutofit fontScale="92500"/>
           </a:bodyPr>
           <a:lstStyle/>
           <a:p>
             <a:r>
-              <a:rPr lang="ru-RU" sz="2000" dirty="0"/>
+              <a:rPr lang="ru-RU" sz="1900" dirty="0"/>
               <a:t>Подавляющее большинство населения Руси составляли крестьяне, работавшие на земле. Почти всё, что было у крестьян, они производили своими руками: еду, одежду, рабочий инструмент. Крестьянское сословие находилось в зависимости от представителей знати. Земледельцы должны были платить налоги князю, на земле которого они жили. Кроме того, в случае государственной необходимости, например во время войны, князь мог привлечь крестьян к различным работам и обложить дополнительным налогом. Зависимых только от князя крестьян называли смердами.</a:t>
             </a:r>
-          </a:p>
-          <a:p>
             <a:endParaRPr lang="ru-RU" sz="2000" dirty="0"/>
           </a:p>
           <a:p>
             <a:r>
-              <a:rPr lang="ru-RU" sz="2000" dirty="0"/>
+              <a:rPr lang="ru-RU" sz="1900" dirty="0"/>
               <a:t>Зачастую смерды попадали в зависимость от крупных землевладельцев ― бояр. Крестьянское хозяйство могло прийти в упадок из-за неурожая, нашествия иноземцев или других обстоятельств. Крестьяне брали в долг у боярина купу ― часть урожая или деньги. Взамен они должны были работать на боярина и постепенно отдавать долг. Крестьянин-должник боярина назывался закупом. Бывало также, что крестьянин полностью разорялся и, не имея другого выхода, вынужден был идти наёмным работником в хозяйство боярина. Такого крестьянина называли рядовичем, поскольку его взаимоотношения с работодателем регулировались специальным договором ― рядом.</a:t>
             </a:r>
-            <a:endParaRPr lang="en-GB" sz="2000" dirty="0"/>
+            <a:endParaRPr lang="en-US" sz="1900" dirty="0"/>
+          </a:p>
+          <a:p>
+            <a:pPr lvl="1"/>
+            <a:r>
+              <a:rPr lang="ru-RU" sz="1200" dirty="0"/>
+              <a:t>Смерд — основная категория сельского населения Древней Руси, как правило зависимая от князя и выплачивающая ему повинности.</a:t>
+            </a:r>
+          </a:p>
+          <a:p>
+            <a:pPr lvl="1"/>
+            <a:r>
+              <a:rPr lang="ru-RU" sz="1200" dirty="0"/>
+              <a:t>Закуп — в Древней Руси лицо, попавшее в долговую кабалу и обязанное своей работой, в том числе на господской пашне, вернуть долг заимодавцу.</a:t>
+            </a:r>
+          </a:p>
+          <a:p>
+            <a:pPr lvl="1"/>
+            <a:r>
+              <a:rPr lang="ru-RU" sz="1200" dirty="0"/>
+              <a:t>Рядович — в Древней Руси лицо, попавшее в зависимость от землевладельца (князя или боярина) на основании заключённого с ним договора — ряда.</a:t>
+            </a:r>
+            <a:endParaRPr lang="en-US" sz="1200" dirty="0"/>
           </a:p>
         </p:txBody>
       </p:sp>
@@ -4122,7 +4143,7 @@
           <a:p>
             <a:r>
               <a:rPr lang="ru-RU" dirty="0"/>
-              <a:t>Всё</a:t>
+              <a:t>Крестьяне</a:t>
             </a:r>
             <a:endParaRPr lang="en-GB" dirty="0"/>
           </a:p>
@@ -4149,7 +4170,13 @@
           <a:bodyPr/>
           <a:lstStyle/>
           <a:p>
-            <a:endParaRPr lang="en-GB" dirty="0"/>
+            <a:pPr marL="0" indent="0">
+              <a:buNone/>
+            </a:pPr>
+            <a:r>
+              <a:rPr lang="ru-RU" dirty="0"/>
+              <a:t>Провинившиеся или не сумевшие отдать долги закупы и рядовичи становились холопами, или челядью, что фактически означало рабство. Холопами также становились иноплеменники, взятые в плен на войне. Рабский статус холопов передавался по наследству. Человек, вступивший в брак с холопом, сам становился холопом. Хозяин мог заставить крестьянина выполнять самую грязную работу или наказать. За убийство холопа хозяином Русская Правда не предусматривала суда.</a:t>
+            </a:r>
           </a:p>
         </p:txBody>
       </p:sp>
@@ -4157,6 +4184,90 @@
     <p:extLst>
       <p:ext uri="{BB962C8B-B14F-4D97-AF65-F5344CB8AC3E}">
         <p14:creationId xmlns:p14="http://schemas.microsoft.com/office/powerpoint/2010/main" val="1032229657"/>
+      </p:ext>
+    </p:extLst>
+  </p:cSld>
+  <p:clrMapOvr>
+    <a:masterClrMapping/>
+  </p:clrMapOvr>
+</p:sld>
+</file>
+
+<file path=ppt/slides/slide8.xml><?xml version="1.0" encoding="utf-8"?>
+<p:sld xmlns:a="http://schemas.openxmlformats.org/drawingml/2006/main" xmlns:r="http://schemas.openxmlformats.org/officeDocument/2006/relationships" xmlns:p="http://schemas.openxmlformats.org/presentationml/2006/main">
+  <p:cSld>
+    <p:spTree>
+      <p:nvGrpSpPr>
+        <p:cNvPr id="1" name=""/>
+        <p:cNvGrpSpPr/>
+        <p:nvPr/>
+      </p:nvGrpSpPr>
+      <p:grpSpPr>
+        <a:xfrm>
+          <a:off x="0" y="0"/>
+          <a:ext cx="0" cy="0"/>
+          <a:chOff x="0" y="0"/>
+          <a:chExt cx="0" cy="0"/>
+        </a:xfrm>
+      </p:grpSpPr>
+      <p:sp>
+        <p:nvSpPr>
+          <p:cNvPr id="2" name="Title 1">
+            <a:extLst>
+              <a:ext uri="{FF2B5EF4-FFF2-40B4-BE49-F238E27FC236}">
+                <a16:creationId xmlns:a16="http://schemas.microsoft.com/office/drawing/2014/main" id="{CF19933C-C8A4-4F34-A45D-2BADEC4C8040}"/>
+              </a:ext>
+            </a:extLst>
+          </p:cNvPr>
+          <p:cNvSpPr>
+            <a:spLocks noGrp="1"/>
+          </p:cNvSpPr>
+          <p:nvPr>
+            <p:ph type="title"/>
+          </p:nvPr>
+        </p:nvSpPr>
+        <p:spPr/>
+        <p:txBody>
+          <a:bodyPr/>
+          <a:lstStyle/>
+          <a:p>
+            <a:r>
+              <a:rPr lang="ru-RU" dirty="0"/>
+              <a:t>Всё</a:t>
+            </a:r>
+            <a:endParaRPr lang="en-GB" dirty="0"/>
+          </a:p>
+        </p:txBody>
+      </p:sp>
+      <p:sp>
+        <p:nvSpPr>
+          <p:cNvPr id="3" name="Content Placeholder 2">
+            <a:extLst>
+              <a:ext uri="{FF2B5EF4-FFF2-40B4-BE49-F238E27FC236}">
+                <a16:creationId xmlns:a16="http://schemas.microsoft.com/office/drawing/2014/main" id="{AC259B5C-D94B-44F5-8DB3-57DB4C68A8FB}"/>
+              </a:ext>
+            </a:extLst>
+          </p:cNvPr>
+          <p:cNvSpPr>
+            <a:spLocks noGrp="1"/>
+          </p:cNvSpPr>
+          <p:nvPr>
+            <p:ph idx="1"/>
+          </p:nvPr>
+        </p:nvSpPr>
+        <p:spPr/>
+        <p:txBody>
+          <a:bodyPr/>
+          <a:lstStyle/>
+          <a:p>
+            <a:endParaRPr lang="en-GB"/>
+          </a:p>
+        </p:txBody>
+      </p:sp>
+    </p:spTree>
+    <p:extLst>
+      <p:ext uri="{BB962C8B-B14F-4D97-AF65-F5344CB8AC3E}">
+        <p14:creationId xmlns:p14="http://schemas.microsoft.com/office/powerpoint/2010/main" val="3263249094"/>
       </p:ext>
     </p:extLst>
   </p:cSld>
